--- a/reports/EEG_Seizure_Detection_Presentation.pptx
+++ b/reports/EEG_Seizure_Detection_Presentation.pptx
@@ -122,33 +122,33 @@
   <p:extLst>
     <p:ext uri="{521415D9-36F7-43E2-AB2F-B90AF26B5E84}">
       <p14:sectionLst xmlns:p14="http://schemas.microsoft.com/office/powerpoint/2010/main">
-        <p14:section name="Introduction" id="{a09e6c9e-cfc3-f949-2a06-bf7b8dadbc76}">
+        <p14:section name="Introduction" id="{a00fa6e5-bb3c-5a33-fa0f-212b0a49c740}">
           <p14:sldIdLst>
             <p14:sldId id="256"/>
             <p14:sldId id="257"/>
             <p14:sldId id="258"/>
           </p14:sldIdLst>
         </p14:section>
-        <p14:section name="Data and exploration" id="{68a92a98-f161-b668-ec39-8c0cb2def227}">
+        <p14:section name="Data and exploration" id="{a2f86b99-dc2a-c322-4685-84e58814275c}">
           <p14:sldIdLst>
             <p14:sldId id="259"/>
             <p14:sldId id="260"/>
             <p14:sldId id="261"/>
           </p14:sldIdLst>
         </p14:section>
-        <p14:section name="Features" id="{bef3c208-2a80-2134-8c99-b88561941bf9}">
+        <p14:section name="Features" id="{602f8c63-b51b-322d-7092-c49d92d7f1b5}">
           <p14:sldIdLst>
             <p14:sldId id="262"/>
             <p14:sldId id="263"/>
           </p14:sldIdLst>
         </p14:section>
-        <p14:section name="Models" id="{4ca025fb-883b-98f6-69d1-eba4cf3c7a20}">
+        <p14:section name="Models" id="{a6c002f8-e994-5172-6067-49338a2b8614}">
           <p14:sldIdLst>
             <p14:sldId id="264"/>
             <p14:sldId id="265"/>
           </p14:sldIdLst>
         </p14:section>
-        <p14:section name="Results" id="{1953c328-09b6-4fdd-93b9-b0ce8ffc0a04}">
+        <p14:section name="Results" id="{7c22ceac-a960-73e4-9900-19c06dd6c598}">
           <p14:sldIdLst>
             <p14:sldId id="266"/>
             <p14:sldId id="267"/>
@@ -156,7 +156,7 @@
             <p14:sldId id="269"/>
           </p14:sldIdLst>
         </p14:section>
-        <p14:section name="Conclusion" id="{381199cd-c295-20a4-a1d6-7e41e8171440}">
+        <p14:section name="Conclusion" id="{4c12e045-487a-a4ab-bb4e-363ddbcf3012}">
           <p14:sldIdLst>
             <p14:sldId id="270"/>
             <p14:sldId id="271"/>
@@ -3990,6 +3990,20 @@
                 </a:solidFill>
               </a:rPr>
               <a:t>Data Mining mini-project</a:t>
+            </a:r>
+            <a:endParaRPr lang="en-US" sz="1800" dirty="0"/>
+          </a:p>
+          <a:p>
+            <a:pPr algn="l" indent="0" marL="0">
+              <a:buNone/>
+            </a:pPr>
+            <a:r>
+              <a:rPr lang="en-US" sz="1800" dirty="0">
+                <a:solidFill>
+                  <a:schemeClr val="bg2"/>
+                </a:solidFill>
+              </a:rPr>
+              <a:t>National School of Engineering of Tunis (ENIT)</a:t>
             </a:r>
             <a:endParaRPr lang="en-US" sz="1800" dirty="0"/>
           </a:p>
